--- a/public/fun/pack/pptx/talkpro/발표템플릿프리미엄_01_사업제안_아이보리로즈골드.pptx
+++ b/public/fun/pack/pptx/talkpro/발표템플릿프리미엄_01_사업제안_아이보리로즈골드.pptx
@@ -115,12 +115,12 @@
   <p:extLst>
     <p:ext uri="{521415D9-36F7-43E2-AB2F-B90AF26B5E84}">
       <p14:sectionLst xmlns:p14="http://schemas.microsoft.com/office/powerpoint/2010/main">
-        <p14:section name="시작" id="{47EF6DE4-B7BB-450B-8490-8A1E34D92B64}">
+        <p14:section name="시작" id="{E38223BC-29E9-4022-8CB0-5D1CF2F1386E}">
           <p14:sldIdLst>
             <p14:sldId id="256"/>
           </p14:sldIdLst>
         </p14:section>
-        <p14:section name="본문" id="{7571B4E1-DFE7-4DC3-89E4-1B4E0F362DAF}">
+        <p14:section name="본문" id="{685D4FF8-162E-443A-A379-99ED7B5B6D57}">
           <p14:sldIdLst>
             <p14:sldId id="257"/>
             <p14:sldId id="258"/>
@@ -131,7 +131,7 @@
             <p14:sldId id="263"/>
           </p14:sldIdLst>
         </p14:section>
-        <p14:section name="마무리" id="{6683B638-5E2C-47CD-AF62-292344CCBEBC}">
+        <p14:section name="마무리" id="{00DBED6F-8DD7-4A3E-8A99-23E6E53424B2}">
           <p14:sldIdLst>
             <p14:sldId id="264"/>
           </p14:sldIdLst>
@@ -2012,7 +2012,7 @@
             </a:lvl1pPr>
           </a:lstStyle>
           <a:p>
-            <a:fld id="{CF7E13D8-3A8E-45DB-A34C-5B7D9157BBB2}" type="slidenum">
+            <a:fld id="{4F1B9C4E-5AEB-4A09-9C45-707243E68C4D}" type="slidenum">
               <a:rPr lang="en-US"/>
               <a:t>‹#›</a:t>
             </a:fld>
@@ -2820,7 +2820,7 @@
             </a:lvl1pPr>
           </a:lstStyle>
           <a:p>
-            <a:fld id="{A1E4F1BC-9D31-46D6-83A5-A0A54C2A80B1}" type="slidenum">
+            <a:fld id="{A3E73D06-BDDA-44B6-83EE-3D7A43E60527}" type="slidenum">
               <a:rPr lang="en-US"/>
               <a:t>‹#›</a:t>
             </a:fld>
@@ -3504,7 +3504,7 @@
             </a:lvl1pPr>
           </a:lstStyle>
           <a:p>
-            <a:fld id="{F1678A49-07F8-4EA7-8A2C-B9B0361D3B0A}" type="slidenum">
+            <a:fld id="{0DC5FE1A-DCC2-4E80-B695-4E485230CF08}" type="slidenum">
               <a:rPr lang="en-US"/>
               <a:t>‹#›</a:t>
             </a:fld>
@@ -4327,7 +4327,7 @@
           <a:p>
             <a:r>
               <a:rPr lang="ko-KR"/>
-              <a:t>올해 상반기에 시작할 수 있는 제안입니다</a:t>
+              <a:t>지금 바로 시작할 수 있는 제안입니다</a:t>
             </a:r>
           </a:p>
         </p:txBody>
@@ -4355,7 +4355,7 @@
           <a:p>
             <a:r>
               <a:rPr lang="ko-KR"/>
-              <a:t>0000. 00. 00</a:t>
+              <a:t>날짜 입력</a:t>
             </a:r>
           </a:p>
         </p:txBody>
@@ -4440,7 +4440,7 @@
           <a:bodyPr/>
           <a:lstStyle/>
           <a:p>
-            <a:fld id="{7D3E858B-1BD1-4DEB-8B2B-01B30E569B1A}" type="slidenum">
+            <a:fld id="{7E44EC04-4935-4BAD-B818-4B5387D6B57E}" type="slidenum">
               <a:rPr lang="en-US"/>
               <a:t>‹#›</a:t>
             </a:fld>
@@ -5638,7 +5638,7 @@
           <a:bodyPr/>
           <a:lstStyle/>
           <a:p>
-            <a:fld id="{2D878BF3-3F48-44A4-91C7-FF2E8B9C253D}" type="slidenum">
+            <a:fld id="{AE20F906-7789-48A6-8E75-18836C35763C}" type="slidenum">
               <a:rPr lang="en-US"/>
               <a:t>‹#›</a:t>
             </a:fld>
@@ -5726,7 +5726,7 @@
           <a:bodyPr/>
           <a:lstStyle/>
           <a:p>
-            <a:fld id="{1B13DF9F-7EEB-4CBF-BEC5-3E85D62E423E}" type="slidenum">
+            <a:fld id="{B2CEA550-0577-42ED-B3E3-979E04A14278}" type="slidenum">
               <a:rPr lang="en-US"/>
               <a:t>‹#›</a:t>
             </a:fld>
@@ -6696,7 +6696,7 @@
           <a:bodyPr/>
           <a:lstStyle/>
           <a:p>
-            <a:fld id="{82E68A7D-7233-4BD6-BE61-935565A8195B}" type="slidenum">
+            <a:fld id="{1829B90B-DFC4-449E-A193-760FF21F7E9E}" type="slidenum">
               <a:rPr lang="en-US"/>
               <a:t>‹#›</a:t>
             </a:fld>
@@ -7348,7 +7348,7 @@
           <a:bodyPr/>
           <a:lstStyle/>
           <a:p>
-            <a:fld id="{13072914-2995-4150-A1E4-E065F51A09DC}" type="slidenum">
+            <a:fld id="{1E86797F-4474-4681-8ABF-244E51223E3A}" type="slidenum">
               <a:rPr lang="en-US"/>
               <a:t>‹#›</a:t>
             </a:fld>
@@ -7531,7 +7531,7 @@
           <a:bodyPr/>
           <a:lstStyle/>
           <a:p>
-            <a:fld id="{6B0FE3D9-6522-442C-B157-F73E8FA712FF}" type="slidenum">
+            <a:fld id="{D4653689-A92B-4A86-8A18-619A32562495}" type="slidenum">
               <a:rPr lang="en-US"/>
               <a:t>‹#›</a:t>
             </a:fld>
@@ -8595,7 +8595,7 @@
           <a:bodyPr/>
           <a:lstStyle/>
           <a:p>
-            <a:fld id="{529542CB-8E6C-46E3-A207-21F777713997}" type="slidenum">
+            <a:fld id="{2C5DADCF-8E24-48A9-B224-1D4523C3B4AB}" type="slidenum">
               <a:rPr lang="en-US"/>
               <a:t>‹#›</a:t>
             </a:fld>
